--- a/学术汇报_时空异质性感知的低空无人机路径规划.pptx
+++ b/学术汇报_时空异质性感知的低空无人机路径规划.pptx
@@ -7,6 +7,7 @@
   <p:sldIdLst>
     <p:sldId id="256" r:id="rId7"/>
     <p:sldId id="257" r:id="rId9"/>
+    <p:sldId id="266" r:id="rId18"/>
     <p:sldId id="258" r:id="rId10"/>
     <p:sldId id="259" r:id="rId11"/>
     <p:sldId id="260" r:id="rId12"/>
@@ -9562,6 +9563,1536 @@
 </p:sld>
 </file>
 
+<file path=ppt/slides/slide11.xml><?xml version="1.0" encoding="utf-8"?>
+<p:sld xmlns:a="http://schemas.openxmlformats.org/drawingml/2006/main" xmlns:p="http://schemas.openxmlformats.org/presentationml/2006/main" xmlns:r="http://schemas.openxmlformats.org/officeDocument/2006/relationships">
+  <p:cSld>
+    <p:spTree>
+      <p:nvGrpSpPr>
+        <p:cNvPr id="1" name=""/>
+        <p:cNvGrpSpPr/>
+        <p:nvPr/>
+      </p:nvGrpSpPr>
+      <p:grpSpPr/>
+      <p:sp>
+        <p:nvSpPr>
+          <p:cNvPr id="2" name="Rectangle 1"/>
+          <p:cNvSpPr/>
+          <p:nvPr/>
+        </p:nvSpPr>
+        <p:spPr>
+          <a:xfrm>
+            <a:off x="0" y="0"/>
+            <a:ext cx="12188952" cy="109728"/>
+          </a:xfrm>
+          <a:prstGeom prst="rect">
+            <a:avLst/>
+          </a:prstGeom>
+          <a:solidFill>
+            <a:srgbClr val="1F3864"/>
+          </a:solidFill>
+          <a:ln>
+            <a:noFill/>
+          </a:ln>
+        </p:spPr>
+        <p:style>
+          <a:lnRef idx="1">
+            <a:schemeClr val="accent1"/>
+          </a:lnRef>
+          <a:fillRef idx="3">
+            <a:schemeClr val="accent1"/>
+          </a:fillRef>
+          <a:effectRef idx="2">
+            <a:schemeClr val="accent1"/>
+          </a:effectRef>
+          <a:fontRef idx="minor">
+            <a:schemeClr val="lt1"/>
+          </a:fontRef>
+        </p:style>
+        <p:txBody>
+          <a:bodyPr rtlCol="0" anchor="ctr"/>
+          <a:lstStyle/>
+          <a:p>
+            <a:pPr algn="ctr"/>
+          </a:p>
+        </p:txBody>
+      </p:sp>
+      <p:sp>
+        <p:nvSpPr>
+          <p:cNvPr id="3" name="Rectangle 2"/>
+          <p:cNvSpPr/>
+          <p:nvPr/>
+        </p:nvSpPr>
+        <p:spPr>
+          <a:xfrm>
+            <a:off x="502920" y="347472"/>
+            <a:ext cx="82296" cy="566928"/>
+          </a:xfrm>
+          <a:prstGeom prst="rect">
+            <a:avLst/>
+          </a:prstGeom>
+          <a:solidFill>
+            <a:srgbClr val="C0392B"/>
+          </a:solidFill>
+          <a:ln>
+            <a:noFill/>
+          </a:ln>
+        </p:spPr>
+        <p:style>
+          <a:lnRef idx="1">
+            <a:schemeClr val="accent1"/>
+          </a:lnRef>
+          <a:fillRef idx="3">
+            <a:schemeClr val="accent1"/>
+          </a:fillRef>
+          <a:effectRef idx="2">
+            <a:schemeClr val="accent1"/>
+          </a:effectRef>
+          <a:fontRef idx="minor">
+            <a:schemeClr val="lt1"/>
+          </a:fontRef>
+        </p:style>
+        <p:txBody>
+          <a:bodyPr rtlCol="0" anchor="ctr"/>
+          <a:lstStyle/>
+          <a:p>
+            <a:pPr algn="ctr"/>
+          </a:p>
+        </p:txBody>
+      </p:sp>
+      <p:sp>
+        <p:nvSpPr>
+          <p:cNvPr id="4" name="TextBox 3"/>
+          <p:cNvSpPr txBox="1"/>
+          <p:nvPr/>
+        </p:nvSpPr>
+        <p:spPr>
+          <a:xfrm>
+            <a:off x="731520" y="292608"/>
+            <a:ext cx="10881360" cy="731520"/>
+          </a:xfrm>
+          <a:prstGeom prst="rect">
+            <a:avLst/>
+          </a:prstGeom>
+          <a:noFill/>
+        </p:spPr>
+        <p:txBody>
+          <a:bodyPr wrap="square">
+            <a:spAutoFit/>
+          </a:bodyPr>
+          <a:lstStyle/>
+          <a:p>
+            <a:r>
+              <a:rPr sz="3000" b="1">
+                <a:solidFill>
+                  <a:srgbClr val="1F3864"/>
+                </a:solidFill>
+                <a:latin typeface="Microsoft YaHei"/>
+              </a:rPr>
+              <a:t>相关工作与研究空白</a:t>
+            </a:r>
+          </a:p>
+        </p:txBody>
+      </p:sp>
+      <p:sp>
+        <p:nvSpPr>
+          <p:cNvPr id="5" name="TextBox 4"/>
+          <p:cNvSpPr txBox="1"/>
+          <p:nvPr/>
+        </p:nvSpPr>
+        <p:spPr>
+          <a:xfrm>
+            <a:off x="749808" y="932688"/>
+            <a:ext cx="10881360" cy="365760"/>
+          </a:xfrm>
+          <a:prstGeom prst="rect">
+            <a:avLst/>
+          </a:prstGeom>
+          <a:noFill/>
+        </p:spPr>
+        <p:txBody>
+          <a:bodyPr wrap="square">
+            <a:spAutoFit/>
+          </a:bodyPr>
+          <a:lstStyle/>
+          <a:p>
+            <a:r>
+              <a:rPr sz="1700" b="0">
+                <a:solidFill>
+                  <a:srgbClr val="595959"/>
+                </a:solidFill>
+                <a:latin typeface="Microsoft YaHei"/>
+              </a:rPr>
+              <a:t>Related Work &amp; Research Gap</a:t>
+            </a:r>
+          </a:p>
+        </p:txBody>
+      </p:sp>
+      <p:graphicFrame>
+        <p:nvGraphicFramePr>
+          <p:cNvPr id="6" name="Table 5"/>
+          <p:cNvGraphicFramePr>
+            <a:graphicFrameLocks noGrp="1"/>
+          </p:cNvGraphicFramePr>
+          <p:nvPr/>
+        </p:nvGraphicFramePr>
+        <p:xfrm>
+          <a:off x="731520" y="1444752"/>
+          <a:ext cx="6720840" cy="4343400"/>
+        </p:xfrm>
+        <a:graphic>
+          <a:graphicData uri="http://schemas.openxmlformats.org/drawingml/2006/table">
+            <a:tbl>
+              <a:tblPr>
+                <a:tableStyleId>{5C22544A-7EE6-4342-B048-85BDC9FD1C3A}</a:tableStyleId>
+              </a:tblPr>
+              <a:tblGrid>
+                <a:gridCol w="1417320"/>
+                <a:gridCol w="1325880"/>
+                <a:gridCol w="1325880"/>
+                <a:gridCol w="1325880"/>
+                <a:gridCol w="1325880"/>
+              </a:tblGrid>
+              <a:tr h="482600">
+                <a:tc>
+                  <a:txBody>
+                    <a:bodyPr wrap="square"/>
+                    <a:lstStyle/>
+                    <a:p>
+                      <a:pPr algn="ctr"/>
+                      <a:r>
+                        <a:rPr sz="1200" b="1">
+                          <a:solidFill>
+                            <a:srgbClr val="FFFFFF"/>
+                          </a:solidFill>
+                          <a:latin typeface="Microsoft YaHei"/>
+                        </a:rPr>
+                        <a:t>维度</a:t>
+                      </a:r>
+                    </a:p>
+                  </a:txBody>
+                  <a:tcPr marL="45720" marR="45720" marT="18288" marB="18288" anchor="ctr">
+                    <a:solidFill>
+                      <a:srgbClr val="1F3864"/>
+                    </a:solidFill>
+                  </a:tcPr>
+                </a:tc>
+                <a:tc>
+                  <a:txBody>
+                    <a:bodyPr wrap="square"/>
+                    <a:lstStyle/>
+                    <a:p>
+                      <a:pPr algn="ctr"/>
+                      <a:r>
+                        <a:rPr sz="1200" b="1">
+                          <a:solidFill>
+                            <a:srgbClr val="FFFFFF"/>
+                          </a:solidFill>
+                          <a:latin typeface="Microsoft YaHei"/>
+                        </a:rPr>
+                        <a:t>Pang 2022</a:t>
+                      </a:r>
+                    </a:p>
+                  </a:txBody>
+                  <a:tcPr marL="45720" marR="45720" marT="18288" marB="18288" anchor="ctr">
+                    <a:solidFill>
+                      <a:srgbClr val="1F3864"/>
+                    </a:solidFill>
+                  </a:tcPr>
+                </a:tc>
+                <a:tc>
+                  <a:txBody>
+                    <a:bodyPr wrap="square"/>
+                    <a:lstStyle/>
+                    <a:p>
+                      <a:pPr algn="ctr"/>
+                      <a:r>
+                        <a:rPr sz="1200" b="1">
+                          <a:solidFill>
+                            <a:srgbClr val="FFFFFF"/>
+                          </a:solidFill>
+                          <a:latin typeface="Microsoft YaHei"/>
+                        </a:rPr>
+                        <a:t>Pang 2024</a:t>
+                      </a:r>
+                    </a:p>
+                  </a:txBody>
+                  <a:tcPr marL="45720" marR="45720" marT="18288" marB="18288" anchor="ctr">
+                    <a:solidFill>
+                      <a:srgbClr val="1F3864"/>
+                    </a:solidFill>
+                  </a:tcPr>
+                </a:tc>
+                <a:tc>
+                  <a:txBody>
+                    <a:bodyPr wrap="square"/>
+                    <a:lstStyle/>
+                    <a:p>
+                      <a:pPr algn="ctr"/>
+                      <a:r>
+                        <a:rPr sz="1200" b="1">
+                          <a:solidFill>
+                            <a:srgbClr val="FFFFFF"/>
+                          </a:solidFill>
+                          <a:latin typeface="Microsoft YaHei"/>
+                        </a:rPr>
+                        <a:t>TRC 2026</a:t>
+                      </a:r>
+                    </a:p>
+                  </a:txBody>
+                  <a:tcPr marL="45720" marR="45720" marT="18288" marB="18288" anchor="ctr">
+                    <a:solidFill>
+                      <a:srgbClr val="1F3864"/>
+                    </a:solidFill>
+                  </a:tcPr>
+                </a:tc>
+                <a:tc>
+                  <a:txBody>
+                    <a:bodyPr wrap="square"/>
+                    <a:lstStyle/>
+                    <a:p>
+                      <a:pPr algn="ctr"/>
+                      <a:r>
+                        <a:rPr sz="1200" b="1">
+                          <a:solidFill>
+                            <a:srgbClr val="FFFFFF"/>
+                          </a:solidFill>
+                          <a:latin typeface="Microsoft YaHei"/>
+                        </a:rPr>
+                        <a:t>本文</a:t>
+                      </a:r>
+                    </a:p>
+                  </a:txBody>
+                  <a:tcPr marL="45720" marR="45720" marT="18288" marB="18288" anchor="ctr">
+                    <a:solidFill>
+                      <a:srgbClr val="1F3864"/>
+                    </a:solidFill>
+                  </a:tcPr>
+                </a:tc>
+              </a:tr>
+              <a:tr h="482600">
+                <a:tc>
+                  <a:txBody>
+                    <a:bodyPr wrap="square"/>
+                    <a:lstStyle/>
+                    <a:p>
+                      <a:pPr algn="l"/>
+                      <a:r>
+                        <a:rPr sz="1100" b="1">
+                          <a:solidFill>
+                            <a:srgbClr val="1F3864"/>
+                          </a:solidFill>
+                          <a:latin typeface="Microsoft YaHei"/>
+                        </a:rPr>
+                        <a:t>风险维度</a:t>
+                      </a:r>
+                    </a:p>
+                  </a:txBody>
+                  <a:tcPr marL="45720" marR="45720" marT="18288" marB="18288" anchor="ctr">
+                    <a:solidFill>
+                      <a:srgbClr val="ECF1F8"/>
+                    </a:solidFill>
+                  </a:tcPr>
+                </a:tc>
+                <a:tc>
+                  <a:txBody>
+                    <a:bodyPr wrap="square"/>
+                    <a:lstStyle/>
+                    <a:p>
+                      <a:pPr algn="ctr"/>
+                      <a:r>
+                        <a:rPr sz="1100" b="0">
+                          <a:solidFill>
+                            <a:srgbClr val="262626"/>
+                          </a:solidFill>
+                          <a:latin typeface="Microsoft YaHei"/>
+                        </a:rPr>
+                        <a:t>致死+财产+噪声</a:t>
+                      </a:r>
+                    </a:p>
+                  </a:txBody>
+                  <a:tcPr marL="45720" marR="45720" marT="18288" marB="18288" anchor="ctr">
+                    <a:solidFill>
+                      <a:srgbClr val="ECF1F8"/>
+                    </a:solidFill>
+                  </a:tcPr>
+                </a:tc>
+                <a:tc>
+                  <a:txBody>
+                    <a:bodyPr wrap="square"/>
+                    <a:lstStyle/>
+                    <a:p>
+                      <a:pPr algn="ctr"/>
+                      <a:r>
+                        <a:rPr sz="1100" b="0">
+                          <a:solidFill>
+                            <a:srgbClr val="262626"/>
+                          </a:solidFill>
+                          <a:latin typeface="Microsoft YaHei"/>
+                        </a:rPr>
+                        <a:t>仅地面风险</a:t>
+                      </a:r>
+                    </a:p>
+                  </a:txBody>
+                  <a:tcPr marL="45720" marR="45720" marT="18288" marB="18288" anchor="ctr">
+                    <a:solidFill>
+                      <a:srgbClr val="ECF1F8"/>
+                    </a:solidFill>
+                  </a:tcPr>
+                </a:tc>
+                <a:tc>
+                  <a:txBody>
+                    <a:bodyPr wrap="square"/>
+                    <a:lstStyle/>
+                    <a:p>
+                      <a:pPr algn="ctr"/>
+                      <a:r>
+                        <a:rPr sz="1100" b="0">
+                          <a:solidFill>
+                            <a:srgbClr val="262626"/>
+                          </a:solidFill>
+                          <a:latin typeface="Microsoft YaHei"/>
+                        </a:rPr>
+                        <a:t>仅碰撞</a:t>
+                      </a:r>
+                    </a:p>
+                  </a:txBody>
+                  <a:tcPr marL="45720" marR="45720" marT="18288" marB="18288" anchor="ctr">
+                    <a:solidFill>
+                      <a:srgbClr val="ECF1F8"/>
+                    </a:solidFill>
+                  </a:tcPr>
+                </a:tc>
+                <a:tc>
+                  <a:txBody>
+                    <a:bodyPr wrap="square"/>
+                    <a:lstStyle/>
+                    <a:p>
+                      <a:pPr algn="ctr"/>
+                      <a:r>
+                        <a:rPr sz="1100" b="1">
+                          <a:solidFill>
+                            <a:srgbClr val="C0392B"/>
+                          </a:solidFill>
+                          <a:latin typeface="Microsoft YaHei"/>
+                        </a:rPr>
+                        <a:t>致死+财产+噪声</a:t>
+                      </a:r>
+                    </a:p>
+                  </a:txBody>
+                  <a:tcPr marL="45720" marR="45720" marT="18288" marB="18288" anchor="ctr">
+                    <a:solidFill>
+                      <a:srgbClr val="FAE6E3"/>
+                    </a:solidFill>
+                  </a:tcPr>
+                </a:tc>
+              </a:tr>
+              <a:tr h="482600">
+                <a:tc>
+                  <a:txBody>
+                    <a:bodyPr wrap="square"/>
+                    <a:lstStyle/>
+                    <a:p>
+                      <a:pPr algn="l"/>
+                      <a:r>
+                        <a:rPr sz="1100" b="1">
+                          <a:solidFill>
+                            <a:srgbClr val="1F3864"/>
+                          </a:solidFill>
+                          <a:latin typeface="Microsoft YaHei"/>
+                        </a:rPr>
+                        <a:t>P_crash 建模</a:t>
+                      </a:r>
+                    </a:p>
+                  </a:txBody>
+                  <a:tcPr marL="45720" marR="45720" marT="18288" marB="18288" anchor="ctr">
+                    <a:solidFill>
+                      <a:srgbClr val="FFFFFF"/>
+                    </a:solidFill>
+                  </a:tcPr>
+                </a:tc>
+                <a:tc>
+                  <a:txBody>
+                    <a:bodyPr wrap="square"/>
+                    <a:lstStyle/>
+                    <a:p>
+                      <a:pPr algn="ctr"/>
+                      <a:r>
+                        <a:rPr sz="1100" b="0">
+                          <a:solidFill>
+                            <a:srgbClr val="262626"/>
+                          </a:solidFill>
+                          <a:latin typeface="Microsoft YaHei"/>
+                        </a:rPr>
+                        <a:t>常数</a:t>
+                      </a:r>
+                    </a:p>
+                  </a:txBody>
+                  <a:tcPr marL="45720" marR="45720" marT="18288" marB="18288" anchor="ctr">
+                    <a:solidFill>
+                      <a:srgbClr val="FFFFFF"/>
+                    </a:solidFill>
+                  </a:tcPr>
+                </a:tc>
+                <a:tc>
+                  <a:txBody>
+                    <a:bodyPr wrap="square"/>
+                    <a:lstStyle/>
+                    <a:p>
+                      <a:pPr algn="ctr"/>
+                      <a:r>
+                        <a:rPr sz="1100" b="0">
+                          <a:solidFill>
+                            <a:srgbClr val="262626"/>
+                          </a:solidFill>
+                          <a:latin typeface="Microsoft YaHei"/>
+                        </a:rPr>
+                        <a:t>随机扰动</a:t>
+                      </a:r>
+                    </a:p>
+                  </a:txBody>
+                  <a:tcPr marL="45720" marR="45720" marT="18288" marB="18288" anchor="ctr">
+                    <a:solidFill>
+                      <a:srgbClr val="FFFFFF"/>
+                    </a:solidFill>
+                  </a:tcPr>
+                </a:tc>
+                <a:tc>
+                  <a:txBody>
+                    <a:bodyPr wrap="square"/>
+                    <a:lstStyle/>
+                    <a:p>
+                      <a:pPr algn="ctr"/>
+                      <a:r>
+                        <a:rPr sz="1100" b="0">
+                          <a:solidFill>
+                            <a:srgbClr val="262626"/>
+                          </a:solidFill>
+                          <a:latin typeface="Microsoft YaHei"/>
+                        </a:rPr>
+                        <a:t>数据驱动</a:t>
+                      </a:r>
+                    </a:p>
+                  </a:txBody>
+                  <a:tcPr marL="45720" marR="45720" marT="18288" marB="18288" anchor="ctr">
+                    <a:solidFill>
+                      <a:srgbClr val="FFFFFF"/>
+                    </a:solidFill>
+                  </a:tcPr>
+                </a:tc>
+                <a:tc>
+                  <a:txBody>
+                    <a:bodyPr wrap="square"/>
+                    <a:lstStyle/>
+                    <a:p>
+                      <a:pPr algn="ctr"/>
+                      <a:r>
+                        <a:rPr sz="1100" b="1">
+                          <a:solidFill>
+                            <a:srgbClr val="C0392B"/>
+                          </a:solidFill>
+                          <a:latin typeface="Microsoft YaHei"/>
+                        </a:rPr>
+                        <a:t>Cox PHM</a:t>
+                      </a:r>
+                    </a:p>
+                  </a:txBody>
+                  <a:tcPr marL="45720" marR="45720" marT="18288" marB="18288" anchor="ctr">
+                    <a:solidFill>
+                      <a:srgbClr val="FAE6E3"/>
+                    </a:solidFill>
+                  </a:tcPr>
+                </a:tc>
+              </a:tr>
+              <a:tr h="482600">
+                <a:tc>
+                  <a:txBody>
+                    <a:bodyPr wrap="square"/>
+                    <a:lstStyle/>
+                    <a:p>
+                      <a:pPr algn="l"/>
+                      <a:r>
+                        <a:rPr sz="1100" b="1">
+                          <a:solidFill>
+                            <a:srgbClr val="1F3864"/>
+                          </a:solidFill>
+                          <a:latin typeface="Microsoft YaHei"/>
+                        </a:rPr>
+                        <a:t>人口密度</a:t>
+                      </a:r>
+                    </a:p>
+                  </a:txBody>
+                  <a:tcPr marL="45720" marR="45720" marT="18288" marB="18288" anchor="ctr">
+                    <a:solidFill>
+                      <a:srgbClr val="ECF1F8"/>
+                    </a:solidFill>
+                  </a:tcPr>
+                </a:tc>
+                <a:tc>
+                  <a:txBody>
+                    <a:bodyPr wrap="square"/>
+                    <a:lstStyle/>
+                    <a:p>
+                      <a:pPr algn="ctr"/>
+                      <a:r>
+                        <a:rPr sz="1100" b="0">
+                          <a:solidFill>
+                            <a:srgbClr val="262626"/>
+                          </a:solidFill>
+                          <a:latin typeface="Microsoft YaHei"/>
+                        </a:rPr>
+                        <a:t>静态</a:t>
+                      </a:r>
+                    </a:p>
+                  </a:txBody>
+                  <a:tcPr marL="45720" marR="45720" marT="18288" marB="18288" anchor="ctr">
+                    <a:solidFill>
+                      <a:srgbClr val="ECF1F8"/>
+                    </a:solidFill>
+                  </a:tcPr>
+                </a:tc>
+                <a:tc>
+                  <a:txBody>
+                    <a:bodyPr wrap="square"/>
+                    <a:lstStyle/>
+                    <a:p>
+                      <a:pPr algn="ctr"/>
+                      <a:r>
+                        <a:rPr sz="1100" b="0">
+                          <a:solidFill>
+                            <a:srgbClr val="262626"/>
+                          </a:solidFill>
+                          <a:latin typeface="Microsoft YaHei"/>
+                        </a:rPr>
+                        <a:t>静态</a:t>
+                      </a:r>
+                    </a:p>
+                  </a:txBody>
+                  <a:tcPr marL="45720" marR="45720" marT="18288" marB="18288" anchor="ctr">
+                    <a:solidFill>
+                      <a:srgbClr val="ECF1F8"/>
+                    </a:solidFill>
+                  </a:tcPr>
+                </a:tc>
+                <a:tc>
+                  <a:txBody>
+                    <a:bodyPr wrap="square"/>
+                    <a:lstStyle/>
+                    <a:p>
+                      <a:pPr algn="ctr"/>
+                      <a:r>
+                        <a:rPr sz="1100" b="0">
+                          <a:solidFill>
+                            <a:srgbClr val="262626"/>
+                          </a:solidFill>
+                          <a:latin typeface="Microsoft YaHei"/>
+                        </a:rPr>
+                        <a:t>—</a:t>
+                      </a:r>
+                    </a:p>
+                  </a:txBody>
+                  <a:tcPr marL="45720" marR="45720" marT="18288" marB="18288" anchor="ctr">
+                    <a:solidFill>
+                      <a:srgbClr val="ECF1F8"/>
+                    </a:solidFill>
+                  </a:tcPr>
+                </a:tc>
+                <a:tc>
+                  <a:txBody>
+                    <a:bodyPr wrap="square"/>
+                    <a:lstStyle/>
+                    <a:p>
+                      <a:pPr algn="ctr"/>
+                      <a:r>
+                        <a:rPr sz="1100" b="1">
+                          <a:solidFill>
+                            <a:srgbClr val="C0392B"/>
+                          </a:solidFill>
+                          <a:latin typeface="Microsoft YaHei"/>
+                        </a:rPr>
+                        <a:t>潮汐模型</a:t>
+                      </a:r>
+                    </a:p>
+                  </a:txBody>
+                  <a:tcPr marL="45720" marR="45720" marT="18288" marB="18288" anchor="ctr">
+                    <a:solidFill>
+                      <a:srgbClr val="FAE6E3"/>
+                    </a:solidFill>
+                  </a:tcPr>
+                </a:tc>
+              </a:tr>
+              <a:tr h="482600">
+                <a:tc>
+                  <a:txBody>
+                    <a:bodyPr wrap="square"/>
+                    <a:lstStyle/>
+                    <a:p>
+                      <a:pPr algn="l"/>
+                      <a:r>
+                        <a:rPr sz="1100" b="1">
+                          <a:solidFill>
+                            <a:srgbClr val="1F3864"/>
+                          </a:solidFill>
+                          <a:latin typeface="Microsoft YaHei"/>
+                        </a:rPr>
+                        <a:t>噪声模型</a:t>
+                      </a:r>
+                    </a:p>
+                  </a:txBody>
+                  <a:tcPr marL="45720" marR="45720" marT="18288" marB="18288" anchor="ctr">
+                    <a:solidFill>
+                      <a:srgbClr val="FFFFFF"/>
+                    </a:solidFill>
+                  </a:tcPr>
+                </a:tc>
+                <a:tc>
+                  <a:txBody>
+                    <a:bodyPr wrap="square"/>
+                    <a:lstStyle/>
+                    <a:p>
+                      <a:pPr algn="ctr"/>
+                      <a:r>
+                        <a:rPr sz="1100" b="0">
+                          <a:solidFill>
+                            <a:srgbClr val="262626"/>
+                          </a:solidFill>
+                          <a:latin typeface="Microsoft YaHei"/>
+                        </a:rPr>
+                        <a:t>距离衰减</a:t>
+                      </a:r>
+                    </a:p>
+                  </a:txBody>
+                  <a:tcPr marL="45720" marR="45720" marT="18288" marB="18288" anchor="ctr">
+                    <a:solidFill>
+                      <a:srgbClr val="FFFFFF"/>
+                    </a:solidFill>
+                  </a:tcPr>
+                </a:tc>
+                <a:tc>
+                  <a:txBody>
+                    <a:bodyPr wrap="square"/>
+                    <a:lstStyle/>
+                    <a:p>
+                      <a:pPr algn="ctr"/>
+                      <a:r>
+                        <a:rPr sz="1100" b="0">
+                          <a:solidFill>
+                            <a:srgbClr val="262626"/>
+                          </a:solidFill>
+                          <a:latin typeface="Microsoft YaHei"/>
+                        </a:rPr>
+                        <a:t>—</a:t>
+                      </a:r>
+                    </a:p>
+                  </a:txBody>
+                  <a:tcPr marL="45720" marR="45720" marT="18288" marB="18288" anchor="ctr">
+                    <a:solidFill>
+                      <a:srgbClr val="FFFFFF"/>
+                    </a:solidFill>
+                  </a:tcPr>
+                </a:tc>
+                <a:tc>
+                  <a:txBody>
+                    <a:bodyPr wrap="square"/>
+                    <a:lstStyle/>
+                    <a:p>
+                      <a:pPr algn="ctr"/>
+                      <a:r>
+                        <a:rPr sz="1100" b="0">
+                          <a:solidFill>
+                            <a:srgbClr val="262626"/>
+                          </a:solidFill>
+                          <a:latin typeface="Microsoft YaHei"/>
+                        </a:rPr>
+                        <a:t>—</a:t>
+                      </a:r>
+                    </a:p>
+                  </a:txBody>
+                  <a:tcPr marL="45720" marR="45720" marT="18288" marB="18288" anchor="ctr">
+                    <a:solidFill>
+                      <a:srgbClr val="FFFFFF"/>
+                    </a:solidFill>
+                  </a:tcPr>
+                </a:tc>
+                <a:tc>
+                  <a:txBody>
+                    <a:bodyPr wrap="square"/>
+                    <a:lstStyle/>
+                    <a:p>
+                      <a:pPr algn="ctr"/>
+                      <a:r>
+                        <a:rPr sz="1100" b="1">
+                          <a:solidFill>
+                            <a:srgbClr val="C0392B"/>
+                          </a:solidFill>
+                          <a:latin typeface="Microsoft YaHei"/>
+                        </a:rPr>
+                        <a:t>S-T 敏感矩阵</a:t>
+                      </a:r>
+                    </a:p>
+                  </a:txBody>
+                  <a:tcPr marL="45720" marR="45720" marT="18288" marB="18288" anchor="ctr">
+                    <a:solidFill>
+                      <a:srgbClr val="FAE6E3"/>
+                    </a:solidFill>
+                  </a:tcPr>
+                </a:tc>
+              </a:tr>
+              <a:tr h="482600">
+                <a:tc>
+                  <a:txBody>
+                    <a:bodyPr wrap="square"/>
+                    <a:lstStyle/>
+                    <a:p>
+                      <a:pPr algn="l"/>
+                      <a:r>
+                        <a:rPr sz="1100" b="1">
+                          <a:solidFill>
+                            <a:srgbClr val="1F3864"/>
+                          </a:solidFill>
+                          <a:latin typeface="Microsoft YaHei"/>
+                        </a:rPr>
+                        <a:t>时间维度</a:t>
+                      </a:r>
+                    </a:p>
+                  </a:txBody>
+                  <a:tcPr marL="45720" marR="45720" marT="18288" marB="18288" anchor="ctr">
+                    <a:solidFill>
+                      <a:srgbClr val="ECF1F8"/>
+                    </a:solidFill>
+                  </a:tcPr>
+                </a:tc>
+                <a:tc>
+                  <a:txBody>
+                    <a:bodyPr wrap="square"/>
+                    <a:lstStyle/>
+                    <a:p>
+                      <a:pPr algn="ctr"/>
+                      <a:r>
+                        <a:rPr sz="1100" b="0">
+                          <a:solidFill>
+                            <a:srgbClr val="262626"/>
+                          </a:solidFill>
+                          <a:latin typeface="Microsoft YaHei"/>
+                        </a:rPr>
+                        <a:t>✗</a:t>
+                      </a:r>
+                    </a:p>
+                  </a:txBody>
+                  <a:tcPr marL="45720" marR="45720" marT="18288" marB="18288" anchor="ctr">
+                    <a:solidFill>
+                      <a:srgbClr val="ECF1F8"/>
+                    </a:solidFill>
+                  </a:tcPr>
+                </a:tc>
+                <a:tc>
+                  <a:txBody>
+                    <a:bodyPr wrap="square"/>
+                    <a:lstStyle/>
+                    <a:p>
+                      <a:pPr algn="ctr"/>
+                      <a:r>
+                        <a:rPr sz="1100" b="0">
+                          <a:solidFill>
+                            <a:srgbClr val="262626"/>
+                          </a:solidFill>
+                          <a:latin typeface="Microsoft YaHei"/>
+                        </a:rPr>
+                        <a:t>✓ 随机</a:t>
+                      </a:r>
+                    </a:p>
+                  </a:txBody>
+                  <a:tcPr marL="45720" marR="45720" marT="18288" marB="18288" anchor="ctr">
+                    <a:solidFill>
+                      <a:srgbClr val="ECF1F8"/>
+                    </a:solidFill>
+                  </a:tcPr>
+                </a:tc>
+                <a:tc>
+                  <a:txBody>
+                    <a:bodyPr wrap="square"/>
+                    <a:lstStyle/>
+                    <a:p>
+                      <a:pPr algn="ctr"/>
+                      <a:r>
+                        <a:rPr sz="1100" b="0">
+                          <a:solidFill>
+                            <a:srgbClr val="262626"/>
+                          </a:solidFill>
+                          <a:latin typeface="Microsoft YaHei"/>
+                        </a:rPr>
+                        <a:t>✓ 数据</a:t>
+                      </a:r>
+                    </a:p>
+                  </a:txBody>
+                  <a:tcPr marL="45720" marR="45720" marT="18288" marB="18288" anchor="ctr">
+                    <a:solidFill>
+                      <a:srgbClr val="ECF1F8"/>
+                    </a:solidFill>
+                  </a:tcPr>
+                </a:tc>
+                <a:tc>
+                  <a:txBody>
+                    <a:bodyPr wrap="square"/>
+                    <a:lstStyle/>
+                    <a:p>
+                      <a:pPr algn="ctr"/>
+                      <a:r>
+                        <a:rPr sz="1100" b="1">
+                          <a:solidFill>
+                            <a:srgbClr val="C0392B"/>
+                          </a:solidFill>
+                          <a:latin typeface="Microsoft YaHei"/>
+                        </a:rPr>
+                        <a:t>✓ 物理机制</a:t>
+                      </a:r>
+                    </a:p>
+                  </a:txBody>
+                  <a:tcPr marL="45720" marR="45720" marT="18288" marB="18288" anchor="ctr">
+                    <a:solidFill>
+                      <a:srgbClr val="FAE6E3"/>
+                    </a:solidFill>
+                  </a:tcPr>
+                </a:tc>
+              </a:tr>
+              <a:tr h="482600">
+                <a:tc>
+                  <a:txBody>
+                    <a:bodyPr wrap="square"/>
+                    <a:lstStyle/>
+                    <a:p>
+                      <a:pPr algn="l"/>
+                      <a:r>
+                        <a:rPr sz="1100" b="1">
+                          <a:solidFill>
+                            <a:srgbClr val="1F3864"/>
+                          </a:solidFill>
+                          <a:latin typeface="Microsoft YaHei"/>
+                        </a:rPr>
+                        <a:t>微气象耦合</a:t>
+                      </a:r>
+                    </a:p>
+                  </a:txBody>
+                  <a:tcPr marL="45720" marR="45720" marT="18288" marB="18288" anchor="ctr">
+                    <a:solidFill>
+                      <a:srgbClr val="FFFFFF"/>
+                    </a:solidFill>
+                  </a:tcPr>
+                </a:tc>
+                <a:tc>
+                  <a:txBody>
+                    <a:bodyPr wrap="square"/>
+                    <a:lstStyle/>
+                    <a:p>
+                      <a:pPr algn="ctr"/>
+                      <a:r>
+                        <a:rPr sz="1100" b="0">
+                          <a:solidFill>
+                            <a:srgbClr val="262626"/>
+                          </a:solidFill>
+                          <a:latin typeface="Microsoft YaHei"/>
+                        </a:rPr>
+                        <a:t>✗</a:t>
+                      </a:r>
+                    </a:p>
+                  </a:txBody>
+                  <a:tcPr marL="45720" marR="45720" marT="18288" marB="18288" anchor="ctr">
+                    <a:solidFill>
+                      <a:srgbClr val="FFFFFF"/>
+                    </a:solidFill>
+                  </a:tcPr>
+                </a:tc>
+                <a:tc>
+                  <a:txBody>
+                    <a:bodyPr wrap="square"/>
+                    <a:lstStyle/>
+                    <a:p>
+                      <a:pPr algn="ctr"/>
+                      <a:r>
+                        <a:rPr sz="1100" b="0">
+                          <a:solidFill>
+                            <a:srgbClr val="262626"/>
+                          </a:solidFill>
+                          <a:latin typeface="Microsoft YaHei"/>
+                        </a:rPr>
+                        <a:t>✗</a:t>
+                      </a:r>
+                    </a:p>
+                  </a:txBody>
+                  <a:tcPr marL="45720" marR="45720" marT="18288" marB="18288" anchor="ctr">
+                    <a:solidFill>
+                      <a:srgbClr val="FFFFFF"/>
+                    </a:solidFill>
+                  </a:tcPr>
+                </a:tc>
+                <a:tc>
+                  <a:txBody>
+                    <a:bodyPr wrap="square"/>
+                    <a:lstStyle/>
+                    <a:p>
+                      <a:pPr algn="ctr"/>
+                      <a:r>
+                        <a:rPr sz="1100" b="0">
+                          <a:solidFill>
+                            <a:srgbClr val="262626"/>
+                          </a:solidFill>
+                          <a:latin typeface="Microsoft YaHei"/>
+                        </a:rPr>
+                        <a:t>✗</a:t>
+                      </a:r>
+                    </a:p>
+                  </a:txBody>
+                  <a:tcPr marL="45720" marR="45720" marT="18288" marB="18288" anchor="ctr">
+                    <a:solidFill>
+                      <a:srgbClr val="FFFFFF"/>
+                    </a:solidFill>
+                  </a:tcPr>
+                </a:tc>
+                <a:tc>
+                  <a:txBody>
+                    <a:bodyPr wrap="square"/>
+                    <a:lstStyle/>
+                    <a:p>
+                      <a:pPr algn="ctr"/>
+                      <a:r>
+                        <a:rPr sz="1100" b="1">
+                          <a:solidFill>
+                            <a:srgbClr val="C0392B"/>
+                          </a:solidFill>
+                          <a:latin typeface="Microsoft YaHei"/>
+                        </a:rPr>
+                        <a:t>✓ 风/雨/峡谷</a:t>
+                      </a:r>
+                    </a:p>
+                  </a:txBody>
+                  <a:tcPr marL="45720" marR="45720" marT="18288" marB="18288" anchor="ctr">
+                    <a:solidFill>
+                      <a:srgbClr val="FAE6E3"/>
+                    </a:solidFill>
+                  </a:tcPr>
+                </a:tc>
+              </a:tr>
+              <a:tr h="482600">
+                <a:tc>
+                  <a:txBody>
+                    <a:bodyPr wrap="square"/>
+                    <a:lstStyle/>
+                    <a:p>
+                      <a:pPr algn="l"/>
+                      <a:r>
+                        <a:rPr sz="1100" b="1">
+                          <a:solidFill>
+                            <a:srgbClr val="1F3864"/>
+                          </a:solidFill>
+                          <a:latin typeface="Microsoft YaHei"/>
+                        </a:rPr>
+                        <a:t>物理可解释性</a:t>
+                      </a:r>
+                    </a:p>
+                  </a:txBody>
+                  <a:tcPr marL="45720" marR="45720" marT="18288" marB="18288" anchor="ctr">
+                    <a:solidFill>
+                      <a:srgbClr val="ECF1F8"/>
+                    </a:solidFill>
+                  </a:tcPr>
+                </a:tc>
+                <a:tc>
+                  <a:txBody>
+                    <a:bodyPr wrap="square"/>
+                    <a:lstStyle/>
+                    <a:p>
+                      <a:pPr algn="ctr"/>
+                      <a:r>
+                        <a:rPr sz="1100" b="0">
+                          <a:solidFill>
+                            <a:srgbClr val="262626"/>
+                          </a:solidFill>
+                          <a:latin typeface="Microsoft YaHei"/>
+                        </a:rPr>
+                        <a:t>低</a:t>
+                      </a:r>
+                    </a:p>
+                  </a:txBody>
+                  <a:tcPr marL="45720" marR="45720" marT="18288" marB="18288" anchor="ctr">
+                    <a:solidFill>
+                      <a:srgbClr val="ECF1F8"/>
+                    </a:solidFill>
+                  </a:tcPr>
+                </a:tc>
+                <a:tc>
+                  <a:txBody>
+                    <a:bodyPr wrap="square"/>
+                    <a:lstStyle/>
+                    <a:p>
+                      <a:pPr algn="ctr"/>
+                      <a:r>
+                        <a:rPr sz="1100" b="0">
+                          <a:solidFill>
+                            <a:srgbClr val="262626"/>
+                          </a:solidFill>
+                          <a:latin typeface="Microsoft YaHei"/>
+                        </a:rPr>
+                        <a:t>中</a:t>
+                      </a:r>
+                    </a:p>
+                  </a:txBody>
+                  <a:tcPr marL="45720" marR="45720" marT="18288" marB="18288" anchor="ctr">
+                    <a:solidFill>
+                      <a:srgbClr val="ECF1F8"/>
+                    </a:solidFill>
+                  </a:tcPr>
+                </a:tc>
+                <a:tc>
+                  <a:txBody>
+                    <a:bodyPr wrap="square"/>
+                    <a:lstStyle/>
+                    <a:p>
+                      <a:pPr algn="ctr"/>
+                      <a:r>
+                        <a:rPr sz="1100" b="0">
+                          <a:solidFill>
+                            <a:srgbClr val="262626"/>
+                          </a:solidFill>
+                          <a:latin typeface="Microsoft YaHei"/>
+                        </a:rPr>
+                        <a:t>低</a:t>
+                      </a:r>
+                    </a:p>
+                  </a:txBody>
+                  <a:tcPr marL="45720" marR="45720" marT="18288" marB="18288" anchor="ctr">
+                    <a:solidFill>
+                      <a:srgbClr val="ECF1F8"/>
+                    </a:solidFill>
+                  </a:tcPr>
+                </a:tc>
+                <a:tc>
+                  <a:txBody>
+                    <a:bodyPr wrap="square"/>
+                    <a:lstStyle/>
+                    <a:p>
+                      <a:pPr algn="ctr"/>
+                      <a:r>
+                        <a:rPr sz="1100" b="1">
+                          <a:solidFill>
+                            <a:srgbClr val="C0392B"/>
+                          </a:solidFill>
+                          <a:latin typeface="Microsoft YaHei"/>
+                        </a:rPr>
+                        <a:t>高</a:t>
+                      </a:r>
+                    </a:p>
+                  </a:txBody>
+                  <a:tcPr marL="45720" marR="45720" marT="18288" marB="18288" anchor="ctr">
+                    <a:solidFill>
+                      <a:srgbClr val="FAE6E3"/>
+                    </a:solidFill>
+                  </a:tcPr>
+                </a:tc>
+              </a:tr>
+              <a:tr h="482600">
+                <a:tc>
+                  <a:txBody>
+                    <a:bodyPr wrap="square"/>
+                    <a:lstStyle/>
+                    <a:p>
+                      <a:pPr algn="l"/>
+                      <a:r>
+                        <a:rPr sz="1100" b="1">
+                          <a:solidFill>
+                            <a:srgbClr val="1F3864"/>
+                          </a:solidFill>
+                          <a:latin typeface="Microsoft YaHei"/>
+                        </a:rPr>
+                        <a:t>规划算法</a:t>
+                      </a:r>
+                    </a:p>
+                  </a:txBody>
+                  <a:tcPr marL="45720" marR="45720" marT="18288" marB="18288" anchor="ctr">
+                    <a:solidFill>
+                      <a:srgbClr val="FFFFFF"/>
+                    </a:solidFill>
+                  </a:tcPr>
+                </a:tc>
+                <a:tc>
+                  <a:txBody>
+                    <a:bodyPr wrap="square"/>
+                    <a:lstStyle/>
+                    <a:p>
+                      <a:pPr algn="ctr"/>
+                      <a:r>
+                        <a:rPr sz="1100" b="0">
+                          <a:solidFill>
+                            <a:srgbClr val="262626"/>
+                          </a:solidFill>
+                          <a:latin typeface="Microsoft YaHei"/>
+                        </a:rPr>
+                        <a:t>Min-cost A*</a:t>
+                      </a:r>
+                    </a:p>
+                  </a:txBody>
+                  <a:tcPr marL="45720" marR="45720" marT="18288" marB="18288" anchor="ctr">
+                    <a:solidFill>
+                      <a:srgbClr val="FFFFFF"/>
+                    </a:solidFill>
+                  </a:tcPr>
+                </a:tc>
+                <a:tc>
+                  <a:txBody>
+                    <a:bodyPr wrap="square"/>
+                    <a:lstStyle/>
+                    <a:p>
+                      <a:pPr algn="ctr"/>
+                      <a:r>
+                        <a:rPr sz="1100" b="0">
+                          <a:solidFill>
+                            <a:srgbClr val="262626"/>
+                          </a:solidFill>
+                          <a:latin typeface="Microsoft YaHei"/>
+                        </a:rPr>
+                        <a:t>两阶段随机</a:t>
+                      </a:r>
+                    </a:p>
+                  </a:txBody>
+                  <a:tcPr marL="45720" marR="45720" marT="18288" marB="18288" anchor="ctr">
+                    <a:solidFill>
+                      <a:srgbClr val="FFFFFF"/>
+                    </a:solidFill>
+                  </a:tcPr>
+                </a:tc>
+                <a:tc>
+                  <a:txBody>
+                    <a:bodyPr wrap="square"/>
+                    <a:lstStyle/>
+                    <a:p>
+                      <a:pPr algn="ctr"/>
+                      <a:r>
+                        <a:rPr sz="1100" b="0">
+                          <a:solidFill>
+                            <a:srgbClr val="262626"/>
+                          </a:solidFill>
+                          <a:latin typeface="Microsoft YaHei"/>
+                        </a:rPr>
+                        <a:t>TL-FDSTA*</a:t>
+                      </a:r>
+                    </a:p>
+                  </a:txBody>
+                  <a:tcPr marL="45720" marR="45720" marT="18288" marB="18288" anchor="ctr">
+                    <a:solidFill>
+                      <a:srgbClr val="FFFFFF"/>
+                    </a:solidFill>
+                  </a:tcPr>
+                </a:tc>
+                <a:tc>
+                  <a:txBody>
+                    <a:bodyPr wrap="square"/>
+                    <a:lstStyle/>
+                    <a:p>
+                      <a:pPr algn="ctr"/>
+                      <a:r>
+                        <a:rPr sz="1100" b="1">
+                          <a:solidFill>
+                            <a:srgbClr val="C0392B"/>
+                          </a:solidFill>
+                          <a:latin typeface="Microsoft YaHei"/>
+                        </a:rPr>
+                        <a:t>TD-RiskA*</a:t>
+                      </a:r>
+                    </a:p>
+                  </a:txBody>
+                  <a:tcPr marL="45720" marR="45720" marT="18288" marB="18288" anchor="ctr">
+                    <a:solidFill>
+                      <a:srgbClr val="FAE6E3"/>
+                    </a:solidFill>
+                  </a:tcPr>
+                </a:tc>
+              </a:tr>
+            </a:tbl>
+          </a:graphicData>
+        </a:graphic>
+      </p:graphicFrame>
+      <p:sp>
+        <p:nvSpPr>
+          <p:cNvPr id="7" name="TextBox 6"/>
+          <p:cNvSpPr txBox="1"/>
+          <p:nvPr/>
+        </p:nvSpPr>
+        <p:spPr>
+          <a:xfrm>
+            <a:off x="731520" y="5870448"/>
+            <a:ext cx="6720840" cy="502920"/>
+          </a:xfrm>
+          <a:prstGeom prst="rect">
+            <a:avLst/>
+          </a:prstGeom>
+          <a:noFill/>
+        </p:spPr>
+        <p:txBody>
+          <a:bodyPr wrap="square">
+            <a:spAutoFit/>
+          </a:bodyPr>
+          <a:lstStyle/>
+          <a:p>
+            <a:r>
+              <a:rPr sz="1200" b="0">
+                <a:solidFill>
+                  <a:srgbClr val="595959"/>
+                </a:solidFill>
+                <a:latin typeface="Microsoft YaHei"/>
+              </a:rPr>
+              <a:t>差异化矩阵：本文是唯一同时具备三维 TPR、物理驱动动态性、</a:t>
+            </a:r>
+          </a:p>
+          <a:p>
+            <a:r>
+              <a:rPr sz="1200" b="0">
+                <a:solidFill>
+                  <a:srgbClr val="595959"/>
+                </a:solidFill>
+                <a:latin typeface="Microsoft YaHei"/>
+              </a:rPr>
+              <a:t>微气象耦合与 S-T 噪声建模的方法</a:t>
+            </a:r>
+          </a:p>
+        </p:txBody>
+      </p:sp>
+      <p:sp>
+        <p:nvSpPr>
+          <p:cNvPr id="8" name="Rectangle 7"/>
+          <p:cNvSpPr/>
+          <p:nvPr/>
+        </p:nvSpPr>
+        <p:spPr>
+          <a:xfrm>
+            <a:off x="7726679" y="1444752"/>
+            <a:ext cx="3749039" cy="4937760"/>
+          </a:xfrm>
+          <a:prstGeom prst="rect">
+            <a:avLst/>
+          </a:prstGeom>
+          <a:solidFill>
+            <a:srgbClr val="ECF1F8"/>
+          </a:solidFill>
+          <a:ln>
+            <a:noFill/>
+          </a:ln>
+        </p:spPr>
+        <p:style>
+          <a:lnRef idx="1">
+            <a:schemeClr val="accent1"/>
+          </a:lnRef>
+          <a:fillRef idx="3">
+            <a:schemeClr val="accent1"/>
+          </a:fillRef>
+          <a:effectRef idx="2">
+            <a:schemeClr val="accent1"/>
+          </a:effectRef>
+          <a:fontRef idx="minor">
+            <a:schemeClr val="lt1"/>
+          </a:fontRef>
+        </p:style>
+        <p:txBody>
+          <a:bodyPr rtlCol="0" anchor="ctr"/>
+          <a:lstStyle/>
+          <a:p>
+            <a:pPr algn="ctr"/>
+          </a:p>
+        </p:txBody>
+      </p:sp>
+      <p:sp>
+        <p:nvSpPr>
+          <p:cNvPr id="9" name="TextBox 8"/>
+          <p:cNvSpPr txBox="1"/>
+          <p:nvPr/>
+        </p:nvSpPr>
+        <p:spPr>
+          <a:xfrm>
+            <a:off x="8001000" y="1691640"/>
+            <a:ext cx="3246120" cy="4572000"/>
+          </a:xfrm>
+          <a:prstGeom prst="rect">
+            <a:avLst/>
+          </a:prstGeom>
+          <a:noFill/>
+        </p:spPr>
+        <p:txBody>
+          <a:bodyPr wrap="square">
+            <a:spAutoFit/>
+          </a:bodyPr>
+          <a:lstStyle/>
+          <a:p>
+            <a:r>
+              <a:rPr sz="1800" b="1">
+                <a:solidFill>
+                  <a:srgbClr val="2E5C9A"/>
+                </a:solidFill>
+                <a:latin typeface="Microsoft YaHei"/>
+              </a:rPr>
+              <a:t>研究空白</a:t>
+            </a:r>
+          </a:p>
+          <a:p>
+            <a:r>
+              <a:rPr sz="1300" b="0">
+                <a:solidFill>
+                  <a:srgbClr val="262626"/>
+                </a:solidFill>
+                <a:latin typeface="Microsoft YaHei"/>
+              </a:rPr>
+              <a:t>▸ Pang 2022：三维 TPR 框架，</a:t>
+            </a:r>
+          </a:p>
+          <a:p>
+            <a:r>
+              <a:rPr sz="1300" b="0">
+                <a:solidFill>
+                  <a:srgbClr val="262626"/>
+                </a:solidFill>
+                <a:latin typeface="Microsoft YaHei"/>
+              </a:rPr>
+              <a:t>   但风险全静态（P_crash 常数）</a:t>
+            </a:r>
+          </a:p>
+          <a:p>
+            <a:r>
+              <a:rPr sz="1300" b="0">
+                <a:solidFill>
+                  <a:srgbClr val="262626"/>
+                </a:solidFill>
+                <a:latin typeface="Microsoft YaHei"/>
+              </a:rPr>
+              <a:t>▸ Pang 2024：动态风险，但无噪</a:t>
+            </a:r>
+          </a:p>
+          <a:p>
+            <a:r>
+              <a:rPr sz="1300" b="0">
+                <a:solidFill>
+                  <a:srgbClr val="262626"/>
+                </a:solidFill>
+                <a:latin typeface="Microsoft YaHei"/>
+              </a:rPr>
+              <a:t>   声/微气象/潮汐人口</a:t>
+            </a:r>
+          </a:p>
+          <a:p>
+            <a:r>
+              <a:rPr sz="1300" b="0">
+                <a:solidFill>
+                  <a:srgbClr val="262626"/>
+                </a:solidFill>
+                <a:latin typeface="Microsoft YaHei"/>
+              </a:rPr>
+              <a:t>▸ TRC 2026：4D 时空 A*，但无</a:t>
+            </a:r>
+          </a:p>
+          <a:p>
+            <a:r>
+              <a:rPr sz="1300" b="0">
+                <a:solidFill>
+                  <a:srgbClr val="262626"/>
+                </a:solidFill>
+                <a:latin typeface="Microsoft YaHei"/>
+              </a:rPr>
+              <a:t>   物理建模、仅碰撞单维风险</a:t>
+            </a:r>
+          </a:p>
+          <a:p>
+            <a:r>
+              <a:rPr sz="600" b="0">
+                <a:solidFill>
+                  <a:srgbClr val="262626"/>
+                </a:solidFill>
+                <a:latin typeface="Microsoft YaHei"/>
+              </a:rPr>
+              <a:t/>
+            </a:r>
+          </a:p>
+          <a:p>
+            <a:r>
+              <a:rPr sz="1800" b="1">
+                <a:solidFill>
+                  <a:srgbClr val="C0392B"/>
+                </a:solidFill>
+                <a:latin typeface="Microsoft YaHei"/>
+              </a:rPr>
+              <a:t>★ 本文生态位</a:t>
+            </a:r>
+          </a:p>
+          <a:p>
+            <a:r>
+              <a:rPr sz="1300" b="1">
+                <a:solidFill>
+                  <a:srgbClr val="1F3864"/>
+                </a:solidFill>
+                <a:latin typeface="Microsoft YaHei"/>
+              </a:rPr>
+              <a:t>Cox PHM 微气象耦合</a:t>
+            </a:r>
+          </a:p>
+          <a:p>
+            <a:r>
+              <a:rPr sz="1300" b="1">
+                <a:solidFill>
+                  <a:srgbClr val="1F3864"/>
+                </a:solidFill>
+                <a:latin typeface="Microsoft YaHei"/>
+              </a:rPr>
+              <a:t>+ 潮汐人口暴露</a:t>
+            </a:r>
+          </a:p>
+          <a:p>
+            <a:r>
+              <a:rPr sz="1300" b="1">
+                <a:solidFill>
+                  <a:srgbClr val="1F3864"/>
+                </a:solidFill>
+                <a:latin typeface="Microsoft YaHei"/>
+              </a:rPr>
+              <a:t>+ S-T 噪声敏感矩阵</a:t>
+            </a:r>
+          </a:p>
+          <a:p>
+            <a:r>
+              <a:rPr sz="600" b="0">
+                <a:solidFill>
+                  <a:srgbClr val="262626"/>
+                </a:solidFill>
+                <a:latin typeface="Microsoft YaHei"/>
+              </a:rPr>
+              <a:t/>
+            </a:r>
+          </a:p>
+          <a:p>
+            <a:r>
+              <a:rPr sz="1300" b="1">
+                <a:solidFill>
+                  <a:srgbClr val="C0392B"/>
+                </a:solidFill>
+                <a:latin typeface="Microsoft YaHei"/>
+              </a:rPr>
+              <a:t>→ 物理可解释的</a:t>
+            </a:r>
+          </a:p>
+          <a:p>
+            <a:r>
+              <a:rPr sz="1300" b="1">
+                <a:solidFill>
+                  <a:srgbClr val="C0392B"/>
+                </a:solidFill>
+                <a:latin typeface="Microsoft YaHei"/>
+              </a:rPr>
+              <a:t>时空异质 TPR 框架</a:t>
+            </a:r>
+          </a:p>
+        </p:txBody>
+      </p:sp>
+    </p:spTree>
+  </p:cSld>
+  <p:clrMapOvr>
+    <a:masterClrMapping/>
+  </p:clrMapOvr>
+</p:sld>
+</file>
+
 <file path=ppt/slides/slide2.xml><?xml version="1.0" encoding="utf-8"?>
 <p:sld xmlns:a="http://schemas.openxmlformats.org/drawingml/2006/main" xmlns:p="http://schemas.openxmlformats.org/presentationml/2006/main" xmlns:r="http://schemas.openxmlformats.org/officeDocument/2006/relationships">
   <p:cSld>
@@ -10440,7 +11971,7 @@
                 </a:solidFill>
                 <a:latin typeface="Microsoft YaHei"/>
               </a:rPr>
-              <a:t>▸ 状态空间 4D (x, y, z, t)，沿飞行时间在线采样风险</a:t>
+              <a:t>▸ 搜索图 3D (x,y,z) 26 邻域；时间作为标签状态传播，沿飞行时间在线采样风险</a:t>
             </a:r>
           </a:p>
           <a:p>
@@ -15020,6 +16551,39 @@
                 <a:latin typeface="Microsoft YaHei"/>
               </a:rPr>
               <a:t>  A：本 OD 无替代走廊；收益来自避开时段性尖峰</a:t>
+            </a:r>
+          </a:p>
+          <a:p>
+            <a:r>
+              <a:rPr sz="1400" b="1">
+                <a:solidFill>
+                  <a:srgbClr val="1F3864"/>
+                </a:solidFill>
+                <a:latin typeface="Microsoft YaHei"/>
+              </a:rPr>
+              <a:t>Q6 与 Pang (2022)/TRC (2026) 有何区别？</a:t>
+            </a:r>
+          </a:p>
+          <a:p>
+            <a:r>
+              <a:rPr sz="1300" b="0">
+                <a:solidFill>
+                  <a:srgbClr val="262626"/>
+                </a:solidFill>
+                <a:latin typeface="Microsoft YaHei"/>
+              </a:rPr>
+              <a:t>  A：物理驱动动态性（Cox PHM+潮汐人口+S-T 噪声），</a:t>
+            </a:r>
+          </a:p>
+          <a:p>
+            <a:r>
+              <a:rPr sz="1300" b="0">
+                <a:solidFill>
+                  <a:srgbClr val="262626"/>
+                </a:solidFill>
+                <a:latin typeface="Microsoft YaHei"/>
+              </a:rPr>
+              <a:t>     TRC 无物理建模、Pang 风险全静态（见相关工作页）</a:t>
             </a:r>
           </a:p>
         </p:txBody>

--- a/学术汇报_时空异质性感知的低空无人机路径规划.pptx
+++ b/学术汇报_时空异质性感知的低空无人机路径规划.pptx
@@ -12,6 +12,7 @@
     <p:sldId id="259" r:id="rId11"/>
     <p:sldId id="260" r:id="rId12"/>
     <p:sldId id="261" r:id="rId13"/>
+    <p:sldId id="267" r:id="rId19"/>
     <p:sldId id="262" r:id="rId14"/>
     <p:sldId id="263" r:id="rId15"/>
     <p:sldId id="264" r:id="rId16"/>
@@ -607,6 +608,146 @@
 </p:notes>
 </file>
 
+<file path=ppt/notesSlides/notesSlide11.xml><?xml version="1.0" encoding="utf-8"?>
+<p:notes xmlns:a="http://schemas.openxmlformats.org/drawingml/2006/main" xmlns:p="http://schemas.openxmlformats.org/presentationml/2006/main" xmlns:r="http://schemas.openxmlformats.org/officeDocument/2006/relationships">
+  <p:cSld>
+    <p:spTree>
+      <p:nvGrpSpPr>
+        <p:cNvPr id="1" name=""/>
+        <p:cNvGrpSpPr/>
+        <p:nvPr/>
+      </p:nvGrpSpPr>
+      <p:grpSpPr>
+        <a:xfrm>
+          <a:off x="0" y="0"/>
+          <a:ext cx="0" cy="0"/>
+          <a:chOff x="0" y="0"/>
+          <a:chExt cx="0" cy="0"/>
+        </a:xfrm>
+      </p:grpSpPr>
+      <p:sp>
+        <p:nvSpPr>
+          <p:cNvPr id="2" name="Slide Image Placeholder 1"/>
+          <p:cNvSpPr>
+            <a:spLocks noGrp="1"/>
+          </p:cNvSpPr>
+          <p:nvPr>
+            <p:ph type="sldImg" idx="2"/>
+          </p:nvPr>
+        </p:nvSpPr>
+        <p:spPr/>
+      </p:sp>
+      <p:sp>
+        <p:nvSpPr>
+          <p:cNvPr id="3" name="Notes Placeholder 2"/>
+          <p:cNvSpPr>
+            <a:spLocks noGrp="1"/>
+          </p:cNvSpPr>
+          <p:nvPr>
+            <p:ph type="body" idx="3" sz="quarter"/>
+          </p:nvPr>
+        </p:nvSpPr>
+        <p:spPr/>
+        <p:txBody>
+          <a:bodyPr/>
+          <a:lstStyle/>
+          <a:p>
+            <a:r>
+              <a:t>【30s-可选/答辩用】针对「出发时刻对比度不足」质疑的压力测试：基准四时刻恰好避开走廊风险的峰（05:45）与谷（17:45），ΔP_crash(12h−22h) 均值仅 1.4e-5。我们在风险峰/谷补跑，把时间对比度拉满（走廊风险峰谷比 1.34）：路径长度极差仅 30.3 m（0.43%），最大两两平均偏离 18.0 m，远小于格对角线 68 m，判定 same corridor。说明「本 OD 无替代走廊」经得住压力测试，路径响应主要体现在高度微调。(b) 分歧放大、(c) 偏离矩阵、(e) Δ 差值面板给出逐时刻判定依据。</a:t>
+            </a:r>
+          </a:p>
+        </p:txBody>
+      </p:sp>
+      <p:sp>
+        <p:nvSpPr>
+          <p:cNvPr id="4" name="Slide Number Placeholder 3"/>
+          <p:cNvSpPr>
+            <a:spLocks noGrp="1"/>
+          </p:cNvSpPr>
+          <p:nvPr>
+            <p:ph type="sldNum" idx="5" sz="quarter"/>
+          </p:nvPr>
+        </p:nvSpPr>
+        <p:spPr/>
+      </p:sp>
+    </p:spTree>
+  </p:cSld>
+  <p:clrMapOvr>
+    <a:masterClrMapping/>
+  </p:clrMapOvr>
+</p:notes>
+</file>
+
+<file path=ppt/notesSlides/notesSlide12.xml><?xml version="1.0" encoding="utf-8"?>
+<p:notes xmlns:a="http://schemas.openxmlformats.org/drawingml/2006/main" xmlns:p="http://schemas.openxmlformats.org/presentationml/2006/main" xmlns:r="http://schemas.openxmlformats.org/officeDocument/2006/relationships">
+  <p:cSld>
+    <p:spTree>
+      <p:nvGrpSpPr>
+        <p:cNvPr id="1" name=""/>
+        <p:cNvGrpSpPr/>
+        <p:nvPr/>
+      </p:nvGrpSpPr>
+      <p:grpSpPr>
+        <a:xfrm>
+          <a:off x="0" y="0"/>
+          <a:ext cx="0" cy="0"/>
+          <a:chOff x="0" y="0"/>
+          <a:chExt cx="0" cy="0"/>
+        </a:xfrm>
+      </p:grpSpPr>
+      <p:sp>
+        <p:nvSpPr>
+          <p:cNvPr id="2" name="Slide Image Placeholder 1"/>
+          <p:cNvSpPr>
+            <a:spLocks noGrp="1"/>
+          </p:cNvSpPr>
+          <p:nvPr>
+            <p:ph type="sldImg" idx="2"/>
+          </p:nvPr>
+        </p:nvSpPr>
+        <p:spPr/>
+      </p:sp>
+      <p:sp>
+        <p:nvSpPr>
+          <p:cNvPr id="3" name="Notes Placeholder 2"/>
+          <p:cNvSpPr>
+            <a:spLocks noGrp="1"/>
+          </p:cNvSpPr>
+          <p:nvPr>
+            <p:ph type="body" idx="3" sz="quarter"/>
+          </p:nvPr>
+        </p:nvSpPr>
+        <p:spPr/>
+        <p:txBody>
+          <a:bodyPr/>
+          <a:lstStyle/>
+          <a:p>
+            <a:r>
+              <a:t>【30s-40s，时间紧可跳过】相关工作三条线：Pang 2022 三维 TPR 但风险全静态（P_crash 常数）；Pang 2024 引入动态风险但无噪声/微气象/潮汐人口；TRC 2026 4D 时空 A* 但无物理建模、仅碰撞单维风险。差异化矩阵说明：本文是唯一同时具备三维 TPR、物理驱动动态性、微气象耦合与 S-T 噪声建模的方法。生态位：物理可解释的时空异质 TPR 框架（Cox PHM 微气象耦合 + 潮汐人口暴露 + S-T 噪声敏感矩阵）。</a:t>
+            </a:r>
+          </a:p>
+        </p:txBody>
+      </p:sp>
+      <p:sp>
+        <p:nvSpPr>
+          <p:cNvPr id="4" name="Slide Number Placeholder 3"/>
+          <p:cNvSpPr>
+            <a:spLocks noGrp="1"/>
+          </p:cNvSpPr>
+          <p:nvPr>
+            <p:ph type="sldNum" idx="5" sz="quarter"/>
+          </p:nvPr>
+        </p:nvSpPr>
+        <p:spPr/>
+      </p:sp>
+    </p:spTree>
+  </p:cSld>
+  <p:clrMapOvr>
+    <a:masterClrMapping/>
+  </p:clrMapOvr>
+</p:notes>
+</file>
+
 <file path=ppt/notesSlides/notesSlide2.xml><?xml version="1.0" encoding="utf-8"?>
 <p:notes xmlns:a="http://schemas.openxmlformats.org/drawingml/2006/main" xmlns:p="http://schemas.openxmlformats.org/presentationml/2006/main" xmlns:r="http://schemas.openxmlformats.org/officeDocument/2006/relationships">
   <p:cSld>
@@ -932,7 +1073,7 @@
           <a:lstStyle/>
           <a:p>
             <a:r>
-              <a:t>【30s-可选】一页说清楚两件事：①对出发时刻的响应很弱（极差0.41%）但高度自由度确实在用，本OD没有替代走廊；②解锁定高和定高锁的路径几乎重合（差10-28米），证明实验二的定高简化是合理的。如果时间紧，这页可跳过，把方法论意义一句话带过。</a:t>
+              <a:t>【30s-可选】一页说清楚两件事：①对出发时刻的响应很弱（极差0.41%）但高度自由度确实在用，本OD没有替代走廊；②解锁定高和定高锁的路径几乎重合（长度差9-15米），证明实验二的定高简化是合理的。如果时间紧，这页可跳过，把方法论意义一句话带过。</a:t>
             </a:r>
           </a:p>
         </p:txBody>
@@ -5149,7 +5290,7 @@
                 </a:solidFill>
                 <a:latin typeface="Microsoft YaHei"/>
               </a:rPr>
-              <a:t>  A：本 OD 无替代走廊；收益来自避开时段性尖峰</a:t>
+              <a:t>   A：本 OD 无替代走廊（峰谷压力测试见补充②）；收益来自避开时段性尖峰</a:t>
             </a:r>
           </a:p>
           <a:p>
@@ -10340,6 +10481,524 @@
                 <a:latin typeface="Microsoft YaHei"/>
               </a:rPr>
               <a:t>统一后评估口径（真实时空场重算）；红色行 = 本文方法；R_ST &lt; R_Static 4/4 时刻成立</a:t>
+            </a:r>
+          </a:p>
+        </p:txBody>
+      </p:sp>
+    </p:spTree>
+  </p:cSld>
+  <p:clrMapOvr>
+    <a:masterClrMapping/>
+  </p:clrMapOvr>
+</p:sld>
+</file>
+
+<file path=ppt/slides/slide12.xml><?xml version="1.0" encoding="utf-8"?>
+<p:sld xmlns:a="http://schemas.openxmlformats.org/drawingml/2006/main" xmlns:p="http://schemas.openxmlformats.org/presentationml/2006/main" xmlns:r="http://schemas.openxmlformats.org/officeDocument/2006/relationships">
+  <p:cSld>
+    <p:spTree>
+      <p:nvGrpSpPr>
+        <p:cNvPr id="1" name=""/>
+        <p:cNvGrpSpPr/>
+        <p:nvPr/>
+      </p:nvGrpSpPr>
+      <p:grpSpPr/>
+      <p:sp>
+        <p:nvSpPr>
+          <p:cNvPr id="2" name="Rectangle 1"/>
+          <p:cNvSpPr/>
+          <p:nvPr/>
+        </p:nvSpPr>
+        <p:spPr>
+          <a:xfrm>
+            <a:off x="0" y="0"/>
+            <a:ext cx="12188952" cy="109728"/>
+          </a:xfrm>
+          <a:prstGeom prst="rect">
+            <a:avLst/>
+          </a:prstGeom>
+          <a:solidFill>
+            <a:srgbClr val="1F3864"/>
+          </a:solidFill>
+          <a:ln>
+            <a:noFill/>
+          </a:ln>
+        </p:spPr>
+        <p:style>
+          <a:lnRef idx="1">
+            <a:schemeClr val="accent1"/>
+          </a:lnRef>
+          <a:fillRef idx="3">
+            <a:schemeClr val="accent1"/>
+          </a:fillRef>
+          <a:effectRef idx="2">
+            <a:schemeClr val="accent1"/>
+          </a:effectRef>
+          <a:fontRef idx="minor">
+            <a:schemeClr val="lt1"/>
+          </a:fontRef>
+        </p:style>
+        <p:txBody>
+          <a:bodyPr rtlCol="0" anchor="ctr"/>
+          <a:lstStyle/>
+          <a:p>
+            <a:pPr algn="ctr"/>
+          </a:p>
+        </p:txBody>
+      </p:sp>
+      <p:sp>
+        <p:nvSpPr>
+          <p:cNvPr id="3" name="Rectangle 2"/>
+          <p:cNvSpPr/>
+          <p:nvPr/>
+        </p:nvSpPr>
+        <p:spPr>
+          <a:xfrm>
+            <a:off x="502920" y="347472"/>
+            <a:ext cx="82296" cy="566928"/>
+          </a:xfrm>
+          <a:prstGeom prst="rect">
+            <a:avLst/>
+          </a:prstGeom>
+          <a:solidFill>
+            <a:srgbClr val="C0392B"/>
+          </a:solidFill>
+          <a:ln>
+            <a:noFill/>
+          </a:ln>
+        </p:spPr>
+        <p:style>
+          <a:lnRef idx="1">
+            <a:schemeClr val="accent1"/>
+          </a:lnRef>
+          <a:fillRef idx="3">
+            <a:schemeClr val="accent1"/>
+          </a:fillRef>
+          <a:effectRef idx="2">
+            <a:schemeClr val="accent1"/>
+          </a:effectRef>
+          <a:fontRef idx="minor">
+            <a:schemeClr val="lt1"/>
+          </a:fontRef>
+        </p:style>
+        <p:txBody>
+          <a:bodyPr rtlCol="0" anchor="ctr"/>
+          <a:lstStyle/>
+          <a:p>
+            <a:pPr algn="ctr"/>
+          </a:p>
+        </p:txBody>
+      </p:sp>
+      <p:sp>
+        <p:nvSpPr>
+          <p:cNvPr id="4" name="TextBox 3"/>
+          <p:cNvSpPr txBox="1"/>
+          <p:nvPr/>
+        </p:nvSpPr>
+        <p:spPr>
+          <a:xfrm>
+            <a:off x="731520" y="292608"/>
+            <a:ext cx="10881360" cy="731520"/>
+          </a:xfrm>
+          <a:prstGeom prst="rect">
+            <a:avLst/>
+          </a:prstGeom>
+          <a:noFill/>
+        </p:spPr>
+        <p:txBody>
+          <a:bodyPr wrap="square">
+            <a:spAutoFit/>
+          </a:bodyPr>
+          <a:lstStyle/>
+          <a:p>
+            <a:r>
+              <a:rPr sz="3000" b="1">
+                <a:solidFill>
+                  <a:srgbClr val="1F3864"/>
+                </a:solidFill>
+                <a:latin typeface="Microsoft YaHei"/>
+              </a:rPr>
+              <a:t>补充②：峰谷压力测试——对比度拉满仍同走廊</a:t>
+            </a:r>
+          </a:p>
+        </p:txBody>
+      </p:sp>
+      <p:sp>
+        <p:nvSpPr>
+          <p:cNvPr id="5" name="TextBox 4"/>
+          <p:cNvSpPr txBox="1"/>
+          <p:nvPr/>
+        </p:nvSpPr>
+        <p:spPr>
+          <a:xfrm>
+            <a:off x="749808" y="932688"/>
+            <a:ext cx="10881360" cy="365760"/>
+          </a:xfrm>
+          <a:prstGeom prst="rect">
+            <a:avLst/>
+          </a:prstGeom>
+          <a:noFill/>
+        </p:spPr>
+        <p:txBody>
+          <a:bodyPr wrap="square">
+            <a:spAutoFit/>
+          </a:bodyPr>
+          <a:lstStyle/>
+          <a:p>
+            <a:r>
+              <a:rPr sz="1400" b="0">
+                <a:solidFill>
+                  <a:srgbClr val="595959"/>
+                </a:solidFill>
+                <a:latin typeface="Microsoft YaHei"/>
+              </a:rPr>
+              <a:t>Stress Test: Path Response at Risk-Peak / Trough Departures</a:t>
+            </a:r>
+          </a:p>
+        </p:txBody>
+      </p:sp>
+      <p:sp>
+        <p:nvSpPr>
+          <p:cNvPr id="6" name="TextBox 5"/>
+          <p:cNvSpPr txBox="1"/>
+          <p:nvPr/>
+        </p:nvSpPr>
+        <p:spPr>
+          <a:xfrm>
+            <a:off x="731520" y="1417320"/>
+            <a:ext cx="5394960" cy="2331720"/>
+          </a:xfrm>
+          <a:prstGeom prst="rect">
+            <a:avLst/>
+          </a:prstGeom>
+          <a:noFill/>
+        </p:spPr>
+        <p:txBody>
+          <a:bodyPr wrap="square">
+            <a:spAutoFit/>
+          </a:bodyPr>
+          <a:lstStyle/>
+          <a:p>
+            <a:r>
+              <a:rPr sz="1700" b="1">
+                <a:solidFill>
+                  <a:srgbClr val="2E5C9A"/>
+                </a:solidFill>
+                <a:latin typeface="Microsoft YaHei"/>
+              </a:rPr>
+              <a:t>为什么要压力测试？</a:t>
+            </a:r>
+          </a:p>
+          <a:p>
+            <a:r>
+              <a:rPr sz="1500" b="0">
+                <a:solidFill>
+                  <a:srgbClr val="262626"/>
+                </a:solidFill>
+                <a:latin typeface="Microsoft YaHei"/>
+              </a:rPr>
+              <a:t>▸ 基准四时刻（08/12/18/22）恰好避开</a:t>
+            </a:r>
+          </a:p>
+          <a:p>
+            <a:r>
+              <a:rPr sz="1500" b="0">
+                <a:solidFill>
+                  <a:srgbClr val="262626"/>
+                </a:solidFill>
+                <a:latin typeface="Microsoft YaHei"/>
+              </a:rPr>
+              <a:t>   走廊风险峰（05:45）与谷（17:45）</a:t>
+            </a:r>
+          </a:p>
+          <a:p>
+            <a:r>
+              <a:rPr sz="1500" b="0">
+                <a:solidFill>
+                  <a:srgbClr val="262626"/>
+                </a:solidFill>
+                <a:latin typeface="Microsoft YaHei"/>
+              </a:rPr>
+              <a:t>▸ ΔP_crash(12h−22h) 均值仅 1.4e-5，</a:t>
+            </a:r>
+          </a:p>
+          <a:p>
+            <a:r>
+              <a:rPr sz="1500" b="0">
+                <a:solidFill>
+                  <a:srgbClr val="262626"/>
+                </a:solidFill>
+                <a:latin typeface="Microsoft YaHei"/>
+              </a:rPr>
+              <a:t>   时间对比度弱 → 路径分化证据受限</a:t>
+            </a:r>
+          </a:p>
+          <a:p>
+            <a:r>
+              <a:rPr sz="1500" b="0">
+                <a:solidFill>
+                  <a:srgbClr val="262626"/>
+                </a:solidFill>
+                <a:latin typeface="Microsoft YaHei"/>
+              </a:rPr>
+              <a:t>▸ 补跑风险峰/谷出发时刻，把对比度拉满</a:t>
+            </a:r>
+          </a:p>
+          <a:p>
+            <a:r>
+              <a:rPr sz="1500" b="1">
+                <a:solidFill>
+                  <a:srgbClr val="262626"/>
+                </a:solidFill>
+                <a:latin typeface="Microsoft YaHei"/>
+              </a:rPr>
+              <a:t>   （走廊风险峰谷比 1.34）</a:t>
+            </a:r>
+          </a:p>
+        </p:txBody>
+      </p:sp>
+      <p:sp>
+        <p:nvSpPr>
+          <p:cNvPr id="7" name="TextBox 6"/>
+          <p:cNvSpPr txBox="1"/>
+          <p:nvPr/>
+        </p:nvSpPr>
+        <p:spPr>
+          <a:xfrm>
+            <a:off x="731520" y="3886200"/>
+            <a:ext cx="5394960" cy="2468880"/>
+          </a:xfrm>
+          <a:prstGeom prst="rect">
+            <a:avLst/>
+          </a:prstGeom>
+          <a:noFill/>
+        </p:spPr>
+        <p:txBody>
+          <a:bodyPr wrap="square">
+            <a:spAutoFit/>
+          </a:bodyPr>
+          <a:lstStyle/>
+          <a:p>
+            <a:r>
+              <a:rPr sz="1700" b="1">
+                <a:solidFill>
+                  <a:srgbClr val="2E5C9A"/>
+                </a:solidFill>
+                <a:latin typeface="Microsoft YaHei"/>
+              </a:rPr>
+              <a:t>结果：对比度拉满，仍然同走廊</a:t>
+            </a:r>
+          </a:p>
+          <a:p>
+            <a:r>
+              <a:rPr sz="1500" b="1">
+                <a:solidFill>
+                  <a:srgbClr val="262626"/>
+                </a:solidFill>
+                <a:latin typeface="Microsoft YaHei"/>
+              </a:rPr>
+              <a:t>L 极差 30.3 m（0.43%），P_surv 0.9832~0.9878</a:t>
+            </a:r>
+          </a:p>
+          <a:p>
+            <a:r>
+              <a:rPr sz="1500" b="0">
+                <a:solidFill>
+                  <a:srgbClr val="262626"/>
+                </a:solidFill>
+                <a:latin typeface="Microsoft YaHei"/>
+              </a:rPr>
+              <a:t>最大两两平均偏离 18.0 m ≪ 格对角线 68 m</a:t>
+            </a:r>
+          </a:p>
+          <a:p>
+            <a:r>
+              <a:rPr sz="1500" b="0">
+                <a:solidFill>
+                  <a:srgbClr val="262626"/>
+                </a:solidFill>
+                <a:latin typeface="Microsoft YaHei"/>
+              </a:rPr>
+              <a:t>图 (b)(c) 判定：same corridor（亚格级调整）</a:t>
+            </a:r>
+          </a:p>
+          <a:p>
+            <a:r>
+              <a:rPr sz="1400" b="1">
+                <a:solidFill>
+                  <a:srgbClr val="C0392B"/>
+                </a:solidFill>
+                <a:latin typeface="Microsoft YaHei"/>
+              </a:rPr>
+              <a:t>→ 「无替代走廊」不是对比度不足造成的假象；</a:t>
+            </a:r>
+          </a:p>
+          <a:p>
+            <a:r>
+              <a:rPr sz="1400" b="1">
+                <a:solidFill>
+                  <a:srgbClr val="C0392B"/>
+                </a:solidFill>
+                <a:latin typeface="Microsoft YaHei"/>
+              </a:rPr>
+              <a:t>   出发时刻不改变走廊，响应体现在高度微调</a:t>
+            </a:r>
+          </a:p>
+        </p:txBody>
+      </p:sp>
+      <p:pic>
+        <p:nvPicPr>
+          <p:cNvPr id="8" name="Picture 7" descr="fig1_risk_field.png"/>
+          <p:cNvPicPr>
+            <a:picLocks noChangeAspect="1"/>
+          </p:cNvPicPr>
+          <p:nvPr/>
+        </p:nvPicPr>
+        <p:blipFill>
+          <a:blip r:embed="rId2"/>
+          <a:stretch>
+            <a:fillRect/>
+          </a:stretch>
+        </p:blipFill>
+        <p:spPr>
+          <a:xfrm>
+            <a:off x="6400800" y="1417320"/>
+            <a:ext cx="5394960" cy="3123397"/>
+          </a:xfrm>
+          <a:prstGeom prst="rect">
+            <a:avLst/>
+          </a:prstGeom>
+        </p:spPr>
+      </p:pic>
+      <p:sp>
+        <p:nvSpPr>
+          <p:cNvPr id="9" name="TextBox 8"/>
+          <p:cNvSpPr txBox="1"/>
+          <p:nvPr/>
+        </p:nvSpPr>
+        <p:spPr>
+          <a:xfrm>
+            <a:off x="6400800" y="4613869"/>
+            <a:ext cx="5394960" cy="502920"/>
+          </a:xfrm>
+          <a:prstGeom prst="rect">
+            <a:avLst/>
+          </a:prstGeom>
+          <a:noFill/>
+        </p:spPr>
+        <p:txBody>
+          <a:bodyPr wrap="square">
+            <a:spAutoFit/>
+          </a:bodyPr>
+          <a:lstStyle/>
+          <a:p>
+            <a:r>
+              <a:rPr sz="1100" b="0">
+                <a:solidFill>
+                  <a:srgbClr val="595959"/>
+                </a:solidFill>
+                <a:latin typeface="Microsoft YaHei"/>
+              </a:rPr>
+              <a:t>图 5  峰谷压力测试（05:45 风险峰 / 17:45 风险谷）</a:t>
+            </a:r>
+          </a:p>
+          <a:p>
+            <a:r>
+              <a:rPr sz="1100" b="0">
+                <a:solidFill>
+                  <a:srgbClr val="595959"/>
+                </a:solidFill>
+                <a:latin typeface="Microsoft YaHei"/>
+              </a:rPr>
+              <a:t>路径叠画·分歧放大·偏离矩阵·Δ 面板；判定语 same corridor</a:t>
+            </a:r>
+          </a:p>
+        </p:txBody>
+      </p:sp>
+      <p:sp>
+        <p:nvSpPr>
+          <p:cNvPr id="10" name="Rectangle 9"/>
+          <p:cNvSpPr/>
+          <p:nvPr/>
+        </p:nvSpPr>
+        <p:spPr>
+          <a:xfrm>
+            <a:off x="6400800" y="5257800"/>
+            <a:ext cx="5394960" cy="1097280"/>
+          </a:xfrm>
+          <a:prstGeom prst="rect">
+            <a:avLst/>
+          </a:prstGeom>
+          <a:solidFill>
+            <a:srgbClr val="ECF1F8"/>
+          </a:solidFill>
+          <a:ln>
+            <a:noFill/>
+          </a:ln>
+        </p:spPr>
+        <p:style>
+          <a:lnRef idx="1">
+            <a:schemeClr val="accent1"/>
+          </a:lnRef>
+          <a:fillRef idx="3">
+            <a:schemeClr val="accent1"/>
+          </a:fillRef>
+          <a:effectRef idx="2">
+            <a:schemeClr val="accent1"/>
+          </a:effectRef>
+          <a:fontRef idx="minor">
+            <a:schemeClr val="lt1"/>
+          </a:fontRef>
+        </p:style>
+        <p:txBody>
+          <a:bodyPr rtlCol="0" anchor="ctr"/>
+          <a:lstStyle/>
+          <a:p>
+            <a:pPr algn="ctr"/>
+          </a:p>
+        </p:txBody>
+      </p:sp>
+      <p:sp>
+        <p:nvSpPr>
+          <p:cNvPr id="11" name="TextBox 10"/>
+          <p:cNvSpPr txBox="1"/>
+          <p:nvPr/>
+        </p:nvSpPr>
+        <p:spPr>
+          <a:xfrm>
+            <a:off x="6675120" y="5413248"/>
+            <a:ext cx="4892040" cy="868680"/>
+          </a:xfrm>
+          <a:prstGeom prst="rect">
+            <a:avLst/>
+          </a:prstGeom>
+          <a:noFill/>
+        </p:spPr>
+        <p:txBody>
+          <a:bodyPr wrap="square">
+            <a:spAutoFit/>
+          </a:bodyPr>
+          <a:lstStyle/>
+          <a:p>
+            <a:r>
+              <a:rPr sz="1500" b="1">
+                <a:solidFill>
+                  <a:srgbClr val="1F3864"/>
+                </a:solidFill>
+                <a:latin typeface="Microsoft YaHei"/>
+              </a:rPr>
+              <a:t>判定规则（图 c）</a:t>
+            </a:r>
+          </a:p>
+          <a:p>
+            <a:r>
+              <a:rPr sz="1300" b="0">
+                <a:solidFill>
+                  <a:srgbClr val="262626"/>
+                </a:solidFill>
+                <a:latin typeface="Microsoft YaHei"/>
+              </a:rPr>
+              <a:t>偏离 &gt; 格对角线（68 m）⇒ 走廊切换；实测最大 18.0 m ⇒ same corridor</a:t>
             </a:r>
           </a:p>
         </p:txBody>
@@ -13270,6 +13929,25 @@
                 </a:solidFill>
                 <a:latin typeface="Microsoft YaHei"/>
               </a:rPr>
+              <a:t>▸ 峰谷时刻压力测试（05:45/17:45）防「对比度不足」质疑</a:t>
+            </a:r>
+          </a:p>
+          <a:p>
+            <a:pPr algn="l">
+              <a:lnSpc>
+                <a:spcPct val="115000"/>
+              </a:lnSpc>
+              <a:spcAft>
+                <a:spcPts val="800"/>
+              </a:spcAft>
+            </a:pPr>
+            <a:r>
+              <a:rPr sz="1500" b="0">
+                <a:solidFill>
+                  <a:srgbClr val="262626"/>
+                </a:solidFill>
+                <a:latin typeface="Microsoft YaHei"/>
+              </a:rPr>
               <a:t>▸ 权重敏感性扫描（4 档）防「挑参数挑出效果」</a:t>
             </a:r>
           </a:p>
@@ -14428,7 +15106,7 @@
                 </a:solidFill>
                 <a:latin typeface="Microsoft YaHei"/>
               </a:rPr>
-              <a:t>补充：路径响应与两实验交叉验证</a:t>
+              <a:t>补充①：路径响应与两实验交叉验证</a:t>
             </a:r>
           </a:p>
         </p:txBody>
@@ -14706,7 +15384,7 @@
                 </a:solidFill>
                 <a:latin typeface="Microsoft YaHei"/>
               </a:rPr>
-              <a:t>两者仅差 10~28 m，P_surv 几乎一致</a:t>
+              <a:t>两者逐时刻仅差 9~15 m，P_surv 几乎一致</a:t>
             </a:r>
           </a:p>
           <a:p>
@@ -14749,30 +15427,6 @@
           </a:p>
         </p:txBody>
       </p:sp>
-      <p:pic>
-        <p:nvPicPr>
-          <p:cNvPr id="8" name="Picture 7" descr="fig3b_path_3d.png"/>
-          <p:cNvPicPr>
-            <a:picLocks noChangeAspect="1"/>
-          </p:cNvPicPr>
-          <p:nvPr/>
-        </p:nvPicPr>
-        <p:blipFill>
-          <a:blip r:embed="rId2"/>
-          <a:stretch>
-            <a:fillRect/>
-          </a:stretch>
-        </p:blipFill>
-        <p:spPr>
-          <a:xfrm>
-            <a:off x="6400800" y="1920240"/>
-            <a:ext cx="5394960" cy="1788044"/>
-          </a:xfrm>
-          <a:prstGeom prst="rect">
-            <a:avLst/>
-          </a:prstGeom>
-        </p:spPr>
-      </p:pic>
       <p:sp>
         <p:nvSpPr>
           <p:cNvPr id="9" name="TextBox 8"/>
@@ -14955,8 +15609,51 @@
               <a:t>「路线切换」，而依赖「时空口径降低实际风险」。</a:t>
             </a:r>
           </a:p>
-        </p:txBody>
-      </p:sp>
+          <a:p>
+            <a:pPr algn="l">
+              <a:lnSpc>
+                <a:spcPct val="115000"/>
+              </a:lnSpc>
+              <a:spcAft>
+                <a:spcPts val="500"/>
+              </a:spcAft>
+            </a:pPr>
+            <a:r>
+              <a:rPr sz="1300" b="1">
+                <a:solidFill>
+                  <a:srgbClr val="C0392B"/>
+                </a:solidFill>
+                <a:latin typeface="Microsoft YaHei"/>
+              </a:rPr>
+              <a:t>→ 峰谷时刻压力测试见下页（补充②）</a:t>
+            </a:r>
+          </a:p>
+        </p:txBody>
+      </p:sp>
+      <p:pic>
+        <p:nvPicPr>
+          <p:cNvPr id="12" name="Picture 11" descr="fig3b_path_3d.png"/>
+          <p:cNvPicPr>
+            <a:picLocks noChangeAspect="1"/>
+          </p:cNvPicPr>
+          <p:nvPr/>
+        </p:nvPicPr>
+        <p:blipFill>
+          <a:blip r:embed="rId4"/>
+          <a:stretch>
+            <a:fillRect/>
+          </a:stretch>
+        </p:blipFill>
+        <p:spPr>
+          <a:xfrm>
+            <a:off x="6400800" y="1920240"/>
+            <a:ext cx="5394960" cy="1788043"/>
+          </a:xfrm>
+          <a:prstGeom prst="rect">
+            <a:avLst/>
+          </a:prstGeom>
+        </p:spPr>
+      </p:pic>
     </p:spTree>
   </p:cSld>
   <p:clrMapOvr>
@@ -15206,7 +15903,7 @@
                 </a:solidFill>
                 <a:latin typeface="Microsoft YaHei"/>
               </a:rPr>
-              <a:t>图 5  (a)(b) 存活率/危险率随出发时刻；(c) 长度-风险 trade-off（Static→ST 箭头即主结论）</a:t>
+              <a:t>图 6  (a)(b) 存活率/危险率随出发时刻；(c) 长度-风险 trade-off（Static→ST 箭头即主结论）</a:t>
             </a:r>
           </a:p>
         </p:txBody>

--- a/学术汇报_时空异质性感知的低空无人机路径规划.pptx
+++ b/学术汇报_时空异质性感知的低空无人机路径规划.pptx
@@ -516,6 +516,11 @@
               <a:t>【10s】各位老师好，我汇报的题目是《时空异质性感知的低空无人机路径规划》。一句话概括：城市低空风险随时空剧烈变化，本研究回答'显式建模这种变化是否值得'。</a:t>
             </a:r>
           </a:p>
+          <a:p>
+            <a:r>
+              <a:t>【主线 5 分钟路径】2→4→5→6→9→10；相关工作(3)与补充①②(7,8)时间紧可跳、留答辩用。总计时：主线 ≈ 5 min，全讲 ≈ 8 min。</a:t>
+            </a:r>
+          </a:p>
         </p:txBody>
       </p:sp>
       <p:sp>
@@ -1213,7 +1218,7 @@
           <a:lstStyle/>
           <a:p>
             <a:r>
-              <a:t>【35s】三条结论对应证据链两环：异质性存在、时空感知更安全、改道证据确凿。一句话总结：时间平均风险图掩盖时段性尖峰，显式建模时空异质性让无人机同样距离飞得更安全。展望两条重点：多OD多城市扩展普适性、真实气象接入。谢谢各位老师，请批评指正。</a:t>
+              <a:t>【35s】先点破：代价比「某些时刻」更普遍——4/4 全部考察时刻均吃亏。三条结论对应证据链两环：异质性存在、时空感知更安全、改道证据确凿。一句话总结：时间平均风险图掩盖时段性尖峰，显式建模时空异质性让无人机同样距离飞得更安全。展望两条重点：多OD多城市扩展普适性、真实气象接入。谢谢各位老师，请批评指正。</a:t>
             </a:r>
           </a:p>
         </p:txBody>
@@ -4775,7 +4780,7 @@
                 </a:solidFill>
                 <a:latin typeface="Microsoft YaHei"/>
               </a:rPr>
-              <a:t>静态风险图让出发时刻付出真实安全代价：</a:t>
+              <a:t>静态风险图让每次出发都付出代价（比「某些时刻」更普遍）：</a:t>
             </a:r>
           </a:p>
           <a:p>
@@ -4808,7 +4813,7 @@
                 </a:solidFill>
                 <a:latin typeface="Microsoft YaHei"/>
               </a:rPr>
-              <a:t>1. 机制：城市低空风险场显著时空异质</a:t>
+              <a:t>1. 机制：城市低空风险场显著时空异质（H1 ✗ 拒绝）</a:t>
             </a:r>
           </a:p>
           <a:p>
@@ -4830,7 +4835,7 @@
                 </a:solidFill>
                 <a:latin typeface="Microsoft YaHei"/>
               </a:rPr>
-              <a:t>2. 方法：时空感知规划 4/4 出发时刻更低风险，</a:t>
+              <a:t>2. 方法：时空感知规划 4/4 时刻更低风险（H2 ✓ 成立），</a:t>
             </a:r>
           </a:p>
           <a:p>
@@ -11572,7 +11577,7 @@
                 </a:solidFill>
                 <a:latin typeface="Microsoft YaHei"/>
               </a:rPr>
-              <a:t>▸ H1 若风险场实际是静态的 → 显式建模时空异质性毫无意义</a:t>
+              <a:t>▸ H1：风险场可由静态图充分刻画 → 显式建模无意义</a:t>
             </a:r>
           </a:p>
           <a:p>
@@ -11583,7 +11588,7 @@
                 </a:solidFill>
                 <a:latin typeface="Microsoft YaHei"/>
               </a:rPr>
-              <a:t>▸ H2 若代价真实存在 → 需要时空感知的规划方法</a:t>
+              <a:t>▸ H2：静态图让规划付出安全代价 → 需要时空感知方法</a:t>
             </a:r>
           </a:p>
         </p:txBody>
